--- a/figures/pptx/Figure_S1.pptx
+++ b/figures/pptx/Figure_S1.pptx
@@ -243,7 +243,7 @@
           <a:p>
             <a:fld id="{8BEA1657-D339-8D48-A767-F3751133C75B}" type="datetimeFigureOut">
               <a:rPr lang="fr-FR" smtClean="0"/>
-              <a:t>30/07/2025</a:t>
+              <a:t>08/08/2025</a:t>
             </a:fld>
             <a:endParaRPr lang="fr-FR"/>
           </a:p>
@@ -413,7 +413,7 @@
           <a:p>
             <a:fld id="{8BEA1657-D339-8D48-A767-F3751133C75B}" type="datetimeFigureOut">
               <a:rPr lang="fr-FR" smtClean="0"/>
-              <a:t>30/07/2025</a:t>
+              <a:t>08/08/2025</a:t>
             </a:fld>
             <a:endParaRPr lang="fr-FR"/>
           </a:p>
@@ -593,7 +593,7 @@
           <a:p>
             <a:fld id="{8BEA1657-D339-8D48-A767-F3751133C75B}" type="datetimeFigureOut">
               <a:rPr lang="fr-FR" smtClean="0"/>
-              <a:t>30/07/2025</a:t>
+              <a:t>08/08/2025</a:t>
             </a:fld>
             <a:endParaRPr lang="fr-FR"/>
           </a:p>
@@ -763,7 +763,7 @@
           <a:p>
             <a:fld id="{8BEA1657-D339-8D48-A767-F3751133C75B}" type="datetimeFigureOut">
               <a:rPr lang="fr-FR" smtClean="0"/>
-              <a:t>30/07/2025</a:t>
+              <a:t>08/08/2025</a:t>
             </a:fld>
             <a:endParaRPr lang="fr-FR"/>
           </a:p>
@@ -1009,7 +1009,7 @@
           <a:p>
             <a:fld id="{8BEA1657-D339-8D48-A767-F3751133C75B}" type="datetimeFigureOut">
               <a:rPr lang="fr-FR" smtClean="0"/>
-              <a:t>30/07/2025</a:t>
+              <a:t>08/08/2025</a:t>
             </a:fld>
             <a:endParaRPr lang="fr-FR"/>
           </a:p>
@@ -1241,7 +1241,7 @@
           <a:p>
             <a:fld id="{8BEA1657-D339-8D48-A767-F3751133C75B}" type="datetimeFigureOut">
               <a:rPr lang="fr-FR" smtClean="0"/>
-              <a:t>30/07/2025</a:t>
+              <a:t>08/08/2025</a:t>
             </a:fld>
             <a:endParaRPr lang="fr-FR"/>
           </a:p>
@@ -1608,7 +1608,7 @@
           <a:p>
             <a:fld id="{8BEA1657-D339-8D48-A767-F3751133C75B}" type="datetimeFigureOut">
               <a:rPr lang="fr-FR" smtClean="0"/>
-              <a:t>30/07/2025</a:t>
+              <a:t>08/08/2025</a:t>
             </a:fld>
             <a:endParaRPr lang="fr-FR"/>
           </a:p>
@@ -1726,7 +1726,7 @@
           <a:p>
             <a:fld id="{8BEA1657-D339-8D48-A767-F3751133C75B}" type="datetimeFigureOut">
               <a:rPr lang="fr-FR" smtClean="0"/>
-              <a:t>30/07/2025</a:t>
+              <a:t>08/08/2025</a:t>
             </a:fld>
             <a:endParaRPr lang="fr-FR"/>
           </a:p>
@@ -1821,7 +1821,7 @@
           <a:p>
             <a:fld id="{8BEA1657-D339-8D48-A767-F3751133C75B}" type="datetimeFigureOut">
               <a:rPr lang="fr-FR" smtClean="0"/>
-              <a:t>30/07/2025</a:t>
+              <a:t>08/08/2025</a:t>
             </a:fld>
             <a:endParaRPr lang="fr-FR"/>
           </a:p>
@@ -2098,7 +2098,7 @@
           <a:p>
             <a:fld id="{8BEA1657-D339-8D48-A767-F3751133C75B}" type="datetimeFigureOut">
               <a:rPr lang="fr-FR" smtClean="0"/>
-              <a:t>30/07/2025</a:t>
+              <a:t>08/08/2025</a:t>
             </a:fld>
             <a:endParaRPr lang="fr-FR"/>
           </a:p>
@@ -2355,7 +2355,7 @@
           <a:p>
             <a:fld id="{8BEA1657-D339-8D48-A767-F3751133C75B}" type="datetimeFigureOut">
               <a:rPr lang="fr-FR" smtClean="0"/>
-              <a:t>30/07/2025</a:t>
+              <a:t>08/08/2025</a:t>
             </a:fld>
             <a:endParaRPr lang="fr-FR"/>
           </a:p>
@@ -2568,7 +2568,7 @@
           <a:p>
             <a:fld id="{8BEA1657-D339-8D48-A767-F3751133C75B}" type="datetimeFigureOut">
               <a:rPr lang="fr-FR" smtClean="0"/>
-              <a:t>30/07/2025</a:t>
+              <a:t>08/08/2025</a:t>
             </a:fld>
             <a:endParaRPr lang="fr-FR"/>
           </a:p>
@@ -3404,8 +3404,8 @@
         </p:nvSpPr>
         <p:spPr>
           <a:xfrm rot="16200000">
-            <a:off x="-392617" y="699810"/>
-            <a:ext cx="1042386" cy="338554"/>
+            <a:off x="-420453" y="701679"/>
+            <a:ext cx="1042386" cy="215444"/>
           </a:xfrm>
           <a:prstGeom prst="rect">
             <a:avLst/>
@@ -3420,7 +3420,7 @@
           <a:p>
             <a:r>
               <a:rPr lang="en-GB" sz="800" dirty="0"/>
-              <a:t>Iron-induced damages</a:t>
+              <a:t>Iron content</a:t>
             </a:r>
           </a:p>
         </p:txBody>
@@ -3756,7 +3756,7 @@
         </p:nvSpPr>
         <p:spPr>
           <a:xfrm>
-            <a:off x="2240511" y="151078"/>
+            <a:off x="2217339" y="151077"/>
             <a:ext cx="741230" cy="369332"/>
           </a:xfrm>
           <a:prstGeom prst="rect">
@@ -3772,7 +3772,7 @@
           <a:p>
             <a:r>
               <a:rPr lang="en-GB" sz="900" dirty="0"/>
-              <a:t>Multimodal data</a:t>
+              <a:t>Multi-omics data</a:t>
             </a:r>
           </a:p>
         </p:txBody>
@@ -3791,8 +3791,8 @@
         </p:nvSpPr>
         <p:spPr>
           <a:xfrm>
-            <a:off x="2306113" y="1115031"/>
-            <a:ext cx="741230" cy="230832"/>
+            <a:off x="2298736" y="1070172"/>
+            <a:ext cx="741230" cy="369332"/>
           </a:xfrm>
           <a:prstGeom prst="rect">
             <a:avLst/>
@@ -3807,7 +3807,7 @@
           <a:p>
             <a:r>
               <a:rPr lang="en-GB" sz="900" dirty="0"/>
-              <a:t>Steatosis</a:t>
+              <a:t>Steatosis evaluation</a:t>
             </a:r>
           </a:p>
         </p:txBody>
